--- a/projects/minmarket/outputs/proposal_v3.pptx
+++ b/projects/minmarket/outputs/proposal_v3.pptx
@@ -5915,7 +5915,7 @@
               </a:defRPr>
             </a:pPr>
             <a:r>
-              <a:t>町丁目単位のエリアDB（人口統計・世帯構成・住居形態）を保持。</a:t>
+              <a:t>町丁目単位のエリアDBと専任の分析チームが在籍。</a:t>
             </a:r>
             <a:br/>
             <a:r>
@@ -6219,11 +6219,15 @@
               </a:defRPr>
             </a:pPr>
             <a:r>
-              <a:t>ポスティング・新聞折込・DM・サンプリング等の豊富な実績。</a:t>
+              <a:t>紙媒体業界で長く勤めたメンバーが担当しており、柔軟な要望にも対応可能。</a:t>
             </a:r>
             <a:br/>
             <a:r>
-              <a:t>エリア特性に応じたメディアミックスをご提案します。</a:t>
+              <a:t>ポスティング・新聞折込・DM・サンプリング等、エリア特性に応じた</a:t>
+            </a:r>
+            <a:br/>
+            <a:r>
+              <a:t>メディアミックスをご提案します。</a:t>
             </a:r>
           </a:p>
         </p:txBody>
